--- a/dist/초4/사회·역사/지역사와유산/초4_사회·역사_지역사와유산_02_지역의역사.pptx
+++ b/dist/초4/사회·역사/지역사와유산/초4_사회·역사_지역사와유산_02_지역의역사.pptx
@@ -121,13 +121,13 @@
   <p:extLst>
     <p:ext uri="{521415D9-36F7-43E2-AB2F-B90AF26B5E84}">
       <p14:sectionLst xmlns:p14="http://schemas.microsoft.com/office/powerpoint/2010/main">
-        <p14:section name="도입" id="{f3938f93-9ae0-d48e-9141-a082a3975f17}">
+        <p14:section name="도입" id="{f81e1ef2-6d71-3f99-9eb4-ba6cc3fb93a1}">
           <p14:sldIdLst>
             <p14:sldId id="256"/>
             <p14:sldId id="257"/>
           </p14:sldIdLst>
         </p14:section>
-        <p14:section name="개념" id="{c6be2526-7f43-cdfd-5ad9-fcc896453a44}">
+        <p14:section name="개념" id="{d305ec8f-86b0-ad31-33f4-d54e6234f133}">
           <p14:sldIdLst>
             <p14:sldId id="258"/>
             <p14:sldId id="259"/>
@@ -135,7 +135,7 @@
             <p14:sldId id="263"/>
           </p14:sldIdLst>
         </p14:section>
-        <p14:section name="연습" id="{227b29a0-db52-4a00-e1eb-1a42b1842d19}">
+        <p14:section name="연습" id="{0c16b675-54ca-4f70-bee6-7b493f71230a}">
           <p14:sldIdLst>
             <p14:sldId id="260"/>
             <p14:sldId id="262"/>
@@ -143,31 +143,31 @@
             <p14:sldId id="265"/>
           </p14:sldIdLst>
         </p14:section>
-        <p14:section name="개념" id="{f0e37a31-70c9-d4d0-8fb9-6c495f623b48}">
+        <p14:section name="개념" id="{140f894b-a2a8-b674-2d36-e28f3aa7dd30}">
           <p14:sldIdLst/>
         </p14:section>
-        <p14:section name="연습" id="{721db43f-1bc3-5341-c647-b1caf1d5cfb8}">
+        <p14:section name="연습" id="{7cd8af72-54e2-3df5-18c2-098f4719c522}">
           <p14:sldIdLst/>
         </p14:section>
-        <p14:section name="개념" id="{a072ae67-b03d-15f1-ca6b-3457443ff155}">
+        <p14:section name="개념" id="{4c462bff-a61c-fcb3-55ef-38830277a68a}">
           <p14:sldIdLst/>
         </p14:section>
-        <p14:section name="연습" id="{da223ee7-d737-1225-e51c-2d53c1156c5c}">
+        <p14:section name="연습" id="{2a1bf520-ded4-13ac-1d74-f421ceea854e}">
           <p14:sldIdLst/>
         </p14:section>
-        <p14:section name="확인" id="{b166063a-fdc8-5740-dd51-061565b63dcb}">
+        <p14:section name="확인" id="{ce5e1880-f5d6-404d-51b8-fec60a2cbaa0}">
           <p14:sldIdLst>
             <p14:sldId id="266"/>
             <p14:sldId id="267"/>
             <p14:sldId id="268"/>
           </p14:sldIdLst>
         </p14:section>
-        <p14:section name="정리" id="{d6647ac4-3245-f694-9821-22fd575eb896}">
+        <p14:section name="정리" id="{7aaa8101-6ad5-5145-0dcc-cccca022c1d0}">
           <p14:sldIdLst>
             <p14:sldId id="269"/>
           </p14:sldIdLst>
         </p14:section>
-        <p14:section name="보충" id="{51b4e30e-e5a5-f98a-4373-fc4f57a4599b}">
+        <p14:section name="보충" id="{b481bbc2-1bdb-b13b-eec8-32c1443d5981}">
           <p14:sldIdLst>
             <p14:sldId id="270"/>
           </p14:sldIdLst>
